--- a/presentation.pptx
+++ b/presentation.pptx
@@ -6,10 +6,11 @@
   </p:sldMasterIdLst>
   <p:sldIdLst>
     <p:sldId id="256" r:id="rId2"/>
-    <p:sldId id="257" r:id="rId3"/>
-    <p:sldId id="259" r:id="rId4"/>
-    <p:sldId id="260" r:id="rId5"/>
-    <p:sldId id="261" r:id="rId6"/>
+    <p:sldId id="262" r:id="rId3"/>
+    <p:sldId id="257" r:id="rId4"/>
+    <p:sldId id="259" r:id="rId5"/>
+    <p:sldId id="260" r:id="rId6"/>
+    <p:sldId id="261" r:id="rId7"/>
   </p:sldIdLst>
   <p:sldSz cx="12192000" cy="6858000"/>
   <p:notesSz cx="6858000" cy="9144000"/>
@@ -108,6 +109,11 @@
       </a:defRPr>
     </a:lvl9pPr>
   </p:defaultTextStyle>
+  <p:extLst>
+    <p:ext uri="{EFAFB233-063F-42B5-8137-9DF3F51BA10A}">
+      <p15:sldGuideLst xmlns:p15="http://schemas.microsoft.com/office/powerpoint/2012/main"/>
+    </p:ext>
+  </p:extLst>
 </p:presentation>
 </file>
 
@@ -405,6 +411,13 @@
             <a:noFill/>
           </a:ln>
         </p:spPr>
+        <p:txBody>
+          <a:bodyPr/>
+          <a:lstStyle/>
+          <a:p>
+            <a:endParaRPr lang="en-US"/>
+          </a:p>
+        </p:txBody>
       </p:sp>
       <p:sp>
         <p:nvSpPr>
@@ -5284,6 +5297,13 @@
               <a:noFill/>
             </a:ln>
           </p:spPr>
+          <p:txBody>
+            <a:bodyPr/>
+            <a:lstStyle/>
+            <a:p>
+              <a:endParaRPr lang="en-US"/>
+            </a:p>
+          </p:txBody>
         </p:sp>
         <p:sp>
           <p:nvSpPr>
@@ -5350,6 +5370,13 @@
               <a:noFill/>
             </a:ln>
           </p:spPr>
+          <p:txBody>
+            <a:bodyPr/>
+            <a:lstStyle/>
+            <a:p>
+              <a:endParaRPr lang="en-US"/>
+            </a:p>
+          </p:txBody>
         </p:sp>
         <p:sp>
           <p:nvSpPr>
@@ -5421,6 +5448,13 @@
               <a:noFill/>
             </a:ln>
           </p:spPr>
+          <p:txBody>
+            <a:bodyPr/>
+            <a:lstStyle/>
+            <a:p>
+              <a:endParaRPr lang="en-US"/>
+            </a:p>
+          </p:txBody>
         </p:sp>
         <p:sp>
           <p:nvSpPr>
@@ -5472,6 +5506,13 @@
               <a:noFill/>
             </a:ln>
           </p:spPr>
+          <p:txBody>
+            <a:bodyPr/>
+            <a:lstStyle/>
+            <a:p>
+              <a:endParaRPr lang="en-US"/>
+            </a:p>
+          </p:txBody>
         </p:sp>
         <p:sp>
           <p:nvSpPr>
@@ -5558,6 +5599,13 @@
               <a:noFill/>
             </a:ln>
           </p:spPr>
+          <p:txBody>
+            <a:bodyPr/>
+            <a:lstStyle/>
+            <a:p>
+              <a:endParaRPr lang="en-US"/>
+            </a:p>
+          </p:txBody>
         </p:sp>
         <p:sp>
           <p:nvSpPr>
@@ -5639,6 +5687,13 @@
               <a:noFill/>
             </a:ln>
           </p:spPr>
+          <p:txBody>
+            <a:bodyPr/>
+            <a:lstStyle/>
+            <a:p>
+              <a:endParaRPr lang="en-US"/>
+            </a:p>
+          </p:txBody>
         </p:sp>
         <p:sp>
           <p:nvSpPr>
@@ -5700,6 +5755,13 @@
               <a:noFill/>
             </a:ln>
           </p:spPr>
+          <p:txBody>
+            <a:bodyPr/>
+            <a:lstStyle/>
+            <a:p>
+              <a:endParaRPr lang="en-US"/>
+            </a:p>
+          </p:txBody>
         </p:sp>
         <p:sp>
           <p:nvSpPr>
@@ -5781,6 +5843,13 @@
               <a:noFill/>
             </a:ln>
           </p:spPr>
+          <p:txBody>
+            <a:bodyPr/>
+            <a:lstStyle/>
+            <a:p>
+              <a:endParaRPr lang="en-US"/>
+            </a:p>
+          </p:txBody>
         </p:sp>
         <p:sp>
           <p:nvSpPr>
@@ -5897,6 +5966,13 @@
               <a:noFill/>
             </a:ln>
           </p:spPr>
+          <p:txBody>
+            <a:bodyPr/>
+            <a:lstStyle/>
+            <a:p>
+              <a:endParaRPr lang="en-US"/>
+            </a:p>
+          </p:txBody>
         </p:sp>
         <p:sp>
           <p:nvSpPr>
@@ -5948,6 +6024,13 @@
               <a:noFill/>
             </a:ln>
           </p:spPr>
+          <p:txBody>
+            <a:bodyPr/>
+            <a:lstStyle/>
+            <a:p>
+              <a:endParaRPr lang="en-US"/>
+            </a:p>
+          </p:txBody>
         </p:sp>
         <p:sp>
           <p:nvSpPr>
@@ -6009,6 +6092,13 @@
               <a:noFill/>
             </a:ln>
           </p:spPr>
+          <p:txBody>
+            <a:bodyPr/>
+            <a:lstStyle/>
+            <a:p>
+              <a:endParaRPr lang="en-US"/>
+            </a:p>
+          </p:txBody>
         </p:sp>
         <p:sp>
           <p:nvSpPr>
@@ -6080,6 +6170,13 @@
               <a:noFill/>
             </a:ln>
           </p:spPr>
+          <p:txBody>
+            <a:bodyPr/>
+            <a:lstStyle/>
+            <a:p>
+              <a:endParaRPr lang="en-US"/>
+            </a:p>
+          </p:txBody>
         </p:sp>
       </p:grpSp>
       <p:grpSp>
@@ -6199,6 +6296,13 @@
               <a:noFill/>
             </a:ln>
           </p:spPr>
+          <p:txBody>
+            <a:bodyPr/>
+            <a:lstStyle/>
+            <a:p>
+              <a:endParaRPr lang="en-US"/>
+            </a:p>
+          </p:txBody>
         </p:sp>
         <p:sp>
           <p:nvSpPr>
@@ -6268,6 +6372,13 @@
               <a:noFill/>
             </a:ln>
           </p:spPr>
+          <p:txBody>
+            <a:bodyPr/>
+            <a:lstStyle/>
+            <a:p>
+              <a:endParaRPr lang="en-US"/>
+            </a:p>
+          </p:txBody>
         </p:sp>
         <p:sp>
           <p:nvSpPr>
@@ -6337,6 +6448,13 @@
               <a:noFill/>
             </a:ln>
           </p:spPr>
+          <p:txBody>
+            <a:bodyPr/>
+            <a:lstStyle/>
+            <a:p>
+              <a:endParaRPr lang="en-US"/>
+            </a:p>
+          </p:txBody>
         </p:sp>
         <p:sp>
           <p:nvSpPr>
@@ -6421,6 +6539,13 @@
               <a:noFill/>
             </a:ln>
           </p:spPr>
+          <p:txBody>
+            <a:bodyPr/>
+            <a:lstStyle/>
+            <a:p>
+              <a:endParaRPr lang="en-US"/>
+            </a:p>
+          </p:txBody>
         </p:sp>
         <p:sp>
           <p:nvSpPr>
@@ -6515,6 +6640,13 @@
               <a:noFill/>
             </a:ln>
           </p:spPr>
+          <p:txBody>
+            <a:bodyPr/>
+            <a:lstStyle/>
+            <a:p>
+              <a:endParaRPr lang="en-US"/>
+            </a:p>
+          </p:txBody>
         </p:sp>
         <p:sp>
           <p:nvSpPr>
@@ -6564,6 +6696,13 @@
               <a:noFill/>
             </a:ln>
           </p:spPr>
+          <p:txBody>
+            <a:bodyPr/>
+            <a:lstStyle/>
+            <a:p>
+              <a:endParaRPr lang="en-US"/>
+            </a:p>
+          </p:txBody>
         </p:sp>
         <p:sp>
           <p:nvSpPr>
@@ -6628,6 +6767,13 @@
               <a:noFill/>
             </a:ln>
           </p:spPr>
+          <p:txBody>
+            <a:bodyPr/>
+            <a:lstStyle/>
+            <a:p>
+              <a:endParaRPr lang="en-US"/>
+            </a:p>
+          </p:txBody>
         </p:sp>
         <p:sp>
           <p:nvSpPr>
@@ -6737,6 +6883,13 @@
               <a:noFill/>
             </a:ln>
           </p:spPr>
+          <p:txBody>
+            <a:bodyPr/>
+            <a:lstStyle/>
+            <a:p>
+              <a:endParaRPr lang="en-US"/>
+            </a:p>
+          </p:txBody>
         </p:sp>
         <p:sp>
           <p:nvSpPr>
@@ -6786,6 +6939,13 @@
               <a:noFill/>
             </a:ln>
           </p:spPr>
+          <p:txBody>
+            <a:bodyPr/>
+            <a:lstStyle/>
+            <a:p>
+              <a:endParaRPr lang="en-US"/>
+            </a:p>
+          </p:txBody>
         </p:sp>
         <p:sp>
           <p:nvSpPr>
@@ -6855,6 +7015,13 @@
               <a:noFill/>
             </a:ln>
           </p:spPr>
+          <p:txBody>
+            <a:bodyPr/>
+            <a:lstStyle/>
+            <a:p>
+              <a:endParaRPr lang="en-US"/>
+            </a:p>
+          </p:txBody>
         </p:sp>
         <p:sp>
           <p:nvSpPr>
@@ -6919,6 +7086,13 @@
               <a:noFill/>
             </a:ln>
           </p:spPr>
+          <p:txBody>
+            <a:bodyPr/>
+            <a:lstStyle/>
+            <a:p>
+              <a:endParaRPr lang="en-US"/>
+            </a:p>
+          </p:txBody>
         </p:sp>
         <p:sp>
           <p:nvSpPr>
@@ -6988,6 +7162,13 @@
               <a:noFill/>
             </a:ln>
           </p:spPr>
+          <p:txBody>
+            <a:bodyPr/>
+            <a:lstStyle/>
+            <a:p>
+              <a:endParaRPr lang="en-US"/>
+            </a:p>
+          </p:txBody>
         </p:sp>
       </p:grpSp>
       <p:sp>
@@ -7026,6 +7207,13 @@
             <a:schemeClr val="lt1"/>
           </a:fontRef>
         </p:style>
+        <p:txBody>
+          <a:bodyPr/>
+          <a:lstStyle/>
+          <a:p>
+            <a:endParaRPr lang="en-US"/>
+          </a:p>
+        </p:txBody>
       </p:sp>
       <p:sp>
         <p:nvSpPr>
@@ -7749,6 +7937,100 @@
 <file path=ppt/slides/slide2.xml><?xml version="1.0" encoding="utf-8"?>
 <p:sld xmlns:a="http://schemas.openxmlformats.org/drawingml/2006/main" xmlns:r="http://schemas.openxmlformats.org/officeDocument/2006/relationships" xmlns:p="http://schemas.openxmlformats.org/presentationml/2006/main">
   <p:cSld>
+    <p:spTree>
+      <p:nvGrpSpPr>
+        <p:cNvPr id="1" name=""/>
+        <p:cNvGrpSpPr/>
+        <p:nvPr/>
+      </p:nvGrpSpPr>
+      <p:grpSpPr>
+        <a:xfrm>
+          <a:off x="0" y="0"/>
+          <a:ext cx="0" cy="0"/>
+          <a:chOff x="0" y="0"/>
+          <a:chExt cx="0" cy="0"/>
+        </a:xfrm>
+      </p:grpSpPr>
+      <p:sp>
+        <p:nvSpPr>
+          <p:cNvPr id="2" name="Title 1">
+            <a:extLst>
+              <a:ext uri="{FF2B5EF4-FFF2-40B4-BE49-F238E27FC236}">
+                <a16:creationId xmlns:a16="http://schemas.microsoft.com/office/drawing/2014/main" id="{E1C3FAAF-286F-06A5-11A1-5C44DE1CCF19}"/>
+              </a:ext>
+            </a:extLst>
+          </p:cNvPr>
+          <p:cNvSpPr>
+            <a:spLocks noGrp="1"/>
+          </p:cNvSpPr>
+          <p:nvPr>
+            <p:ph type="title"/>
+          </p:nvPr>
+        </p:nvSpPr>
+        <p:spPr/>
+        <p:txBody>
+          <a:bodyPr/>
+          <a:lstStyle/>
+          <a:p>
+            <a:r>
+              <a:rPr lang="en-US" dirty="0"/>
+              <a:t>Brief Intro</a:t>
+            </a:r>
+          </a:p>
+        </p:txBody>
+      </p:sp>
+      <p:sp>
+        <p:nvSpPr>
+          <p:cNvPr id="3" name="Content Placeholder 2">
+            <a:extLst>
+              <a:ext uri="{FF2B5EF4-FFF2-40B4-BE49-F238E27FC236}">
+                <a16:creationId xmlns:a16="http://schemas.microsoft.com/office/drawing/2014/main" id="{70A7EDF6-A234-0BAA-6B0D-EE2B2046F7F1}"/>
+              </a:ext>
+            </a:extLst>
+          </p:cNvPr>
+          <p:cNvSpPr>
+            <a:spLocks noGrp="1"/>
+          </p:cNvSpPr>
+          <p:nvPr>
+            <p:ph idx="1"/>
+          </p:nvPr>
+        </p:nvSpPr>
+        <p:spPr/>
+        <p:txBody>
+          <a:bodyPr>
+            <a:normAutofit/>
+          </a:bodyPr>
+          <a:lstStyle/>
+          <a:p>
+            <a:r>
+              <a:rPr lang="en-US" sz="4400" dirty="0"/>
+              <a:t>Branch prediction used to update next PC preemptively</a:t>
+            </a:r>
+          </a:p>
+          <a:p>
+            <a:r>
+              <a:rPr lang="en-US" sz="4400" dirty="0"/>
+              <a:t>3 branch predictors used in this project</a:t>
+            </a:r>
+          </a:p>
+        </p:txBody>
+      </p:sp>
+    </p:spTree>
+    <p:extLst>
+      <p:ext uri="{BB962C8B-B14F-4D97-AF65-F5344CB8AC3E}">
+        <p14:creationId xmlns:p14="http://schemas.microsoft.com/office/powerpoint/2010/main" val="4148594036"/>
+      </p:ext>
+    </p:extLst>
+  </p:cSld>
+  <p:clrMapOvr>
+    <a:masterClrMapping/>
+  </p:clrMapOvr>
+</p:sld>
+</file>
+
+<file path=ppt/slides/slide3.xml><?xml version="1.0" encoding="utf-8"?>
+<p:sld xmlns:a="http://schemas.openxmlformats.org/drawingml/2006/main" xmlns:r="http://schemas.openxmlformats.org/officeDocument/2006/relationships" xmlns:p="http://schemas.openxmlformats.org/presentationml/2006/main">
+  <p:cSld>
     <p:bg>
       <p:bgPr>
         <a:gradFill rotWithShape="1">
@@ -8284,7 +8566,7 @@
 </p:sld>
 </file>
 
-<file path=ppt/slides/slide3.xml><?xml version="1.0" encoding="utf-8"?>
+<file path=ppt/slides/slide4.xml><?xml version="1.0" encoding="utf-8"?>
 <p:sld xmlns:a="http://schemas.openxmlformats.org/drawingml/2006/main" xmlns:r="http://schemas.openxmlformats.org/officeDocument/2006/relationships" xmlns:p="http://schemas.openxmlformats.org/presentationml/2006/main">
   <p:cSld>
     <p:bg>
@@ -8797,7 +9079,7 @@
 </p:sld>
 </file>
 
-<file path=ppt/slides/slide4.xml><?xml version="1.0" encoding="utf-8"?>
+<file path=ppt/slides/slide5.xml><?xml version="1.0" encoding="utf-8"?>
 <p:sld xmlns:a="http://schemas.openxmlformats.org/drawingml/2006/main" xmlns:r="http://schemas.openxmlformats.org/officeDocument/2006/relationships" xmlns:p="http://schemas.openxmlformats.org/presentationml/2006/main">
   <p:cSld>
     <p:bg>
@@ -9376,7 +9658,7 @@
 </p:sld>
 </file>
 
-<file path=ppt/slides/slide5.xml><?xml version="1.0" encoding="utf-8"?>
+<file path=ppt/slides/slide6.xml><?xml version="1.0" encoding="utf-8"?>
 <p:sld xmlns:a="http://schemas.openxmlformats.org/drawingml/2006/main" xmlns:r="http://schemas.openxmlformats.org/officeDocument/2006/relationships" xmlns:p="http://schemas.openxmlformats.org/presentationml/2006/main">
   <p:cSld>
     <p:bg>

--- a/presentation.pptx
+++ b/presentation.pptx
@@ -305,7 +305,7 @@
           <a:p>
             <a:fld id="{881E3564-4CE8-48D3-A61E-4443F66FC718}" type="datetimeFigureOut">
               <a:rPr lang="en-US" smtClean="0"/>
-              <a:t>5/3/2026</a:t>
+              <a:t>5/4/2026</a:t>
             </a:fld>
             <a:endParaRPr lang="en-US"/>
           </a:p>
@@ -650,7 +650,7 @@
           <a:p>
             <a:fld id="{881E3564-4CE8-48D3-A61E-4443F66FC718}" type="datetimeFigureOut">
               <a:rPr lang="en-US" smtClean="0"/>
-              <a:t>5/3/2026</a:t>
+              <a:t>5/4/2026</a:t>
             </a:fld>
             <a:endParaRPr lang="en-US"/>
           </a:p>
@@ -1051,7 +1051,7 @@
           <a:p>
             <a:fld id="{881E3564-4CE8-48D3-A61E-4443F66FC718}" type="datetimeFigureOut">
               <a:rPr lang="en-US" smtClean="0"/>
-              <a:t>5/3/2026</a:t>
+              <a:t>5/4/2026</a:t>
             </a:fld>
             <a:endParaRPr lang="en-US"/>
           </a:p>
@@ -1387,7 +1387,7 @@
           <a:p>
             <a:fld id="{881E3564-4CE8-48D3-A61E-4443F66FC718}" type="datetimeFigureOut">
               <a:rPr lang="en-US" smtClean="0"/>
-              <a:t>5/3/2026</a:t>
+              <a:t>5/4/2026</a:t>
             </a:fld>
             <a:endParaRPr lang="en-US"/>
           </a:p>
@@ -1707,7 +1707,7 @@
           <a:p>
             <a:fld id="{881E3564-4CE8-48D3-A61E-4443F66FC718}" type="datetimeFigureOut">
               <a:rPr lang="en-US" smtClean="0"/>
-              <a:t>5/3/2026</a:t>
+              <a:t>5/4/2026</a:t>
             </a:fld>
             <a:endParaRPr lang="en-US"/>
           </a:p>
@@ -2103,7 +2103,7 @@
           <a:p>
             <a:fld id="{881E3564-4CE8-48D3-A61E-4443F66FC718}" type="datetimeFigureOut">
               <a:rPr lang="en-US" smtClean="0"/>
-              <a:t>5/3/2026</a:t>
+              <a:t>5/4/2026</a:t>
             </a:fld>
             <a:endParaRPr lang="en-US"/>
           </a:p>
@@ -2360,7 +2360,7 @@
           <a:p>
             <a:fld id="{881E3564-4CE8-48D3-A61E-4443F66FC718}" type="datetimeFigureOut">
               <a:rPr lang="en-US" smtClean="0"/>
-              <a:t>5/3/2026</a:t>
+              <a:t>5/4/2026</a:t>
             </a:fld>
             <a:endParaRPr lang="en-US"/>
           </a:p>
@@ -2622,7 +2622,7 @@
           <a:p>
             <a:fld id="{881E3564-4CE8-48D3-A61E-4443F66FC718}" type="datetimeFigureOut">
               <a:rPr lang="en-US" smtClean="0"/>
-              <a:t>5/3/2026</a:t>
+              <a:t>5/4/2026</a:t>
             </a:fld>
             <a:endParaRPr lang="en-US"/>
           </a:p>
@@ -2884,7 +2884,7 @@
           <a:p>
             <a:fld id="{881E3564-4CE8-48D3-A61E-4443F66FC718}" type="datetimeFigureOut">
               <a:rPr lang="en-US" smtClean="0"/>
-              <a:t>5/3/2026</a:t>
+              <a:t>5/4/2026</a:t>
             </a:fld>
             <a:endParaRPr lang="en-US"/>
           </a:p>
@@ -3213,7 +3213,7 @@
           <a:p>
             <a:fld id="{881E3564-4CE8-48D3-A61E-4443F66FC718}" type="datetimeFigureOut">
               <a:rPr lang="en-US" smtClean="0"/>
-              <a:t>5/3/2026</a:t>
+              <a:t>5/4/2026</a:t>
             </a:fld>
             <a:endParaRPr lang="en-US"/>
           </a:p>
@@ -3536,7 +3536,7 @@
           <a:p>
             <a:fld id="{881E3564-4CE8-48D3-A61E-4443F66FC718}" type="datetimeFigureOut">
               <a:rPr lang="en-US" smtClean="0"/>
-              <a:t>5/3/2026</a:t>
+              <a:t>5/4/2026</a:t>
             </a:fld>
             <a:endParaRPr lang="en-US"/>
           </a:p>
@@ -3993,7 +3993,7 @@
           <a:p>
             <a:fld id="{881E3564-4CE8-48D3-A61E-4443F66FC718}" type="datetimeFigureOut">
               <a:rPr lang="en-US" smtClean="0"/>
-              <a:t>5/3/2026</a:t>
+              <a:t>5/4/2026</a:t>
             </a:fld>
             <a:endParaRPr lang="en-US"/>
           </a:p>
@@ -4198,7 +4198,7 @@
           <a:p>
             <a:fld id="{881E3564-4CE8-48D3-A61E-4443F66FC718}" type="datetimeFigureOut">
               <a:rPr lang="en-US" smtClean="0"/>
-              <a:t>5/3/2026</a:t>
+              <a:t>5/4/2026</a:t>
             </a:fld>
             <a:endParaRPr lang="en-US"/>
           </a:p>
@@ -4375,7 +4375,7 @@
           <a:p>
             <a:fld id="{881E3564-4CE8-48D3-A61E-4443F66FC718}" type="datetimeFigureOut">
               <a:rPr lang="en-US" smtClean="0"/>
-              <a:t>5/3/2026</a:t>
+              <a:t>5/4/2026</a:t>
             </a:fld>
             <a:endParaRPr lang="en-US"/>
           </a:p>
@@ -4708,7 +4708,7 @@
           <a:p>
             <a:fld id="{881E3564-4CE8-48D3-A61E-4443F66FC718}" type="datetimeFigureOut">
               <a:rPr lang="en-US" smtClean="0"/>
-              <a:t>5/3/2026</a:t>
+              <a:t>5/4/2026</a:t>
             </a:fld>
             <a:endParaRPr lang="en-US"/>
           </a:p>
@@ -5053,7 +5053,7 @@
           <a:p>
             <a:fld id="{881E3564-4CE8-48D3-A61E-4443F66FC718}" type="datetimeFigureOut">
               <a:rPr lang="en-US" smtClean="0"/>
-              <a:t>5/3/2026</a:t>
+              <a:t>5/4/2026</a:t>
             </a:fld>
             <a:endParaRPr lang="en-US"/>
           </a:p>
@@ -7345,7 +7345,7 @@
           <a:p>
             <a:fld id="{881E3564-4CE8-48D3-A61E-4443F66FC718}" type="datetimeFigureOut">
               <a:rPr lang="en-US" smtClean="0"/>
-              <a:t>5/3/2026</a:t>
+              <a:t>5/4/2026</a:t>
             </a:fld>
             <a:endParaRPr lang="en-US"/>
           </a:p>
@@ -8073,7 +8073,7 @@
       </p:grpSpPr>
       <p:sp useBgFill="1">
         <p:nvSpPr>
-          <p:cNvPr id="14" name="Rectangle 13">
+          <p:cNvPr id="23" name="Rectangle 22">
             <a:extLst>
               <a:ext uri="{FF2B5EF4-FFF2-40B4-BE49-F238E27FC236}">
                 <a16:creationId xmlns:a16="http://schemas.microsoft.com/office/drawing/2014/main" id="{9073237B-D536-4B4C-8928-3510CB0F8984}"/>
@@ -8168,7 +8168,7 @@
       </p:sp>
       <p:sp>
         <p:nvSpPr>
-          <p:cNvPr id="16" name="Rectangle 15">
+          <p:cNvPr id="25" name="Rectangle 24">
             <a:extLst>
               <a:ext uri="{FF2B5EF4-FFF2-40B4-BE49-F238E27FC236}">
                 <a16:creationId xmlns:a16="http://schemas.microsoft.com/office/drawing/2014/main" id="{488B1383-B33A-45D9-AF5F-DD1522135AD3}"/>
@@ -8307,10 +8307,10 @@
       </p:pic>
       <p:pic>
         <p:nvPicPr>
-          <p:cNvPr id="7" name="Picture 6">
+          <p:cNvPr id="4" name="Picture 3">
             <a:extLst>
               <a:ext uri="{FF2B5EF4-FFF2-40B4-BE49-F238E27FC236}">
-                <a16:creationId xmlns:a16="http://schemas.microsoft.com/office/drawing/2014/main" id="{045A090B-A629-CEDC-592F-D5A9BD82394A}"/>
+                <a16:creationId xmlns:a16="http://schemas.microsoft.com/office/drawing/2014/main" id="{E70FAF7F-DDEE-6940-2F4B-A92D1D977D41}"/>
               </a:ext>
             </a:extLst>
           </p:cNvPr>
@@ -8320,16 +8320,15 @@
           <p:nvPr/>
         </p:nvPicPr>
         <p:blipFill>
-          <a:blip r:embed="rId2"/>
-          <a:srcRect t="44655"/>
+          <a:blip r:embed="rId3"/>
           <a:stretch>
             <a:fillRect/>
           </a:stretch>
         </p:blipFill>
         <p:spPr>
           <a:xfrm>
-            <a:off x="8193436" y="640080"/>
-            <a:ext cx="3364441" cy="5252773"/>
+            <a:off x="8178194" y="919357"/>
+            <a:ext cx="3394926" cy="4694219"/>
           </a:xfrm>
           <a:prstGeom prst="rect">
             <a:avLst/>
@@ -8338,7 +8337,7 @@
       </p:pic>
       <p:sp>
         <p:nvSpPr>
-          <p:cNvPr id="18" name="Freeform 11">
+          <p:cNvPr id="27" name="Freeform 11">
             <a:extLst>
               <a:ext uri="{FF2B5EF4-FFF2-40B4-BE49-F238E27FC236}">
                 <a16:creationId xmlns:a16="http://schemas.microsoft.com/office/drawing/2014/main" id="{ADD2565E-493E-4545-99C0-2F033FAF94AE}"/>

--- a/presentation.pptx
+++ b/presentation.pptx
@@ -305,7 +305,7 @@
           <a:p>
             <a:fld id="{881E3564-4CE8-48D3-A61E-4443F66FC718}" type="datetimeFigureOut">
               <a:rPr lang="en-US" smtClean="0"/>
-              <a:t>5/4/2026</a:t>
+              <a:t>5/6/2026</a:t>
             </a:fld>
             <a:endParaRPr lang="en-US"/>
           </a:p>
@@ -650,7 +650,7 @@
           <a:p>
             <a:fld id="{881E3564-4CE8-48D3-A61E-4443F66FC718}" type="datetimeFigureOut">
               <a:rPr lang="en-US" smtClean="0"/>
-              <a:t>5/4/2026</a:t>
+              <a:t>5/6/2026</a:t>
             </a:fld>
             <a:endParaRPr lang="en-US"/>
           </a:p>
@@ -1051,7 +1051,7 @@
           <a:p>
             <a:fld id="{881E3564-4CE8-48D3-A61E-4443F66FC718}" type="datetimeFigureOut">
               <a:rPr lang="en-US" smtClean="0"/>
-              <a:t>5/4/2026</a:t>
+              <a:t>5/6/2026</a:t>
             </a:fld>
             <a:endParaRPr lang="en-US"/>
           </a:p>
@@ -1387,7 +1387,7 @@
           <a:p>
             <a:fld id="{881E3564-4CE8-48D3-A61E-4443F66FC718}" type="datetimeFigureOut">
               <a:rPr lang="en-US" smtClean="0"/>
-              <a:t>5/4/2026</a:t>
+              <a:t>5/6/2026</a:t>
             </a:fld>
             <a:endParaRPr lang="en-US"/>
           </a:p>
@@ -1707,7 +1707,7 @@
           <a:p>
             <a:fld id="{881E3564-4CE8-48D3-A61E-4443F66FC718}" type="datetimeFigureOut">
               <a:rPr lang="en-US" smtClean="0"/>
-              <a:t>5/4/2026</a:t>
+              <a:t>5/6/2026</a:t>
             </a:fld>
             <a:endParaRPr lang="en-US"/>
           </a:p>
@@ -2103,7 +2103,7 @@
           <a:p>
             <a:fld id="{881E3564-4CE8-48D3-A61E-4443F66FC718}" type="datetimeFigureOut">
               <a:rPr lang="en-US" smtClean="0"/>
-              <a:t>5/4/2026</a:t>
+              <a:t>5/6/2026</a:t>
             </a:fld>
             <a:endParaRPr lang="en-US"/>
           </a:p>
@@ -2360,7 +2360,7 @@
           <a:p>
             <a:fld id="{881E3564-4CE8-48D3-A61E-4443F66FC718}" type="datetimeFigureOut">
               <a:rPr lang="en-US" smtClean="0"/>
-              <a:t>5/4/2026</a:t>
+              <a:t>5/6/2026</a:t>
             </a:fld>
             <a:endParaRPr lang="en-US"/>
           </a:p>
@@ -2622,7 +2622,7 @@
           <a:p>
             <a:fld id="{881E3564-4CE8-48D3-A61E-4443F66FC718}" type="datetimeFigureOut">
               <a:rPr lang="en-US" smtClean="0"/>
-              <a:t>5/4/2026</a:t>
+              <a:t>5/6/2026</a:t>
             </a:fld>
             <a:endParaRPr lang="en-US"/>
           </a:p>
@@ -2884,7 +2884,7 @@
           <a:p>
             <a:fld id="{881E3564-4CE8-48D3-A61E-4443F66FC718}" type="datetimeFigureOut">
               <a:rPr lang="en-US" smtClean="0"/>
-              <a:t>5/4/2026</a:t>
+              <a:t>5/6/2026</a:t>
             </a:fld>
             <a:endParaRPr lang="en-US"/>
           </a:p>
@@ -2990,6 +2990,13 @@
             <a:noFill/>
           </a:ln>
         </p:spPr>
+        <p:txBody>
+          <a:bodyPr/>
+          <a:lstStyle/>
+          <a:p>
+            <a:endParaRPr lang="en-US"/>
+          </a:p>
+        </p:txBody>
       </p:sp>
       <p:sp>
         <p:nvSpPr>
@@ -3213,7 +3220,7 @@
           <a:p>
             <a:fld id="{881E3564-4CE8-48D3-A61E-4443F66FC718}" type="datetimeFigureOut">
               <a:rPr lang="en-US" smtClean="0"/>
-              <a:t>5/4/2026</a:t>
+              <a:t>5/6/2026</a:t>
             </a:fld>
             <a:endParaRPr lang="en-US"/>
           </a:p>
@@ -3536,7 +3543,7 @@
           <a:p>
             <a:fld id="{881E3564-4CE8-48D3-A61E-4443F66FC718}" type="datetimeFigureOut">
               <a:rPr lang="en-US" smtClean="0"/>
-              <a:t>5/4/2026</a:t>
+              <a:t>5/6/2026</a:t>
             </a:fld>
             <a:endParaRPr lang="en-US"/>
           </a:p>
@@ -3993,7 +4000,7 @@
           <a:p>
             <a:fld id="{881E3564-4CE8-48D3-A61E-4443F66FC718}" type="datetimeFigureOut">
               <a:rPr lang="en-US" smtClean="0"/>
-              <a:t>5/4/2026</a:t>
+              <a:t>5/6/2026</a:t>
             </a:fld>
             <a:endParaRPr lang="en-US"/>
           </a:p>
@@ -4198,7 +4205,7 @@
           <a:p>
             <a:fld id="{881E3564-4CE8-48D3-A61E-4443F66FC718}" type="datetimeFigureOut">
               <a:rPr lang="en-US" smtClean="0"/>
-              <a:t>5/4/2026</a:t>
+              <a:t>5/6/2026</a:t>
             </a:fld>
             <a:endParaRPr lang="en-US"/>
           </a:p>
@@ -4375,7 +4382,7 @@
           <a:p>
             <a:fld id="{881E3564-4CE8-48D3-A61E-4443F66FC718}" type="datetimeFigureOut">
               <a:rPr lang="en-US" smtClean="0"/>
-              <a:t>5/4/2026</a:t>
+              <a:t>5/6/2026</a:t>
             </a:fld>
             <a:endParaRPr lang="en-US"/>
           </a:p>
@@ -4708,7 +4715,7 @@
           <a:p>
             <a:fld id="{881E3564-4CE8-48D3-A61E-4443F66FC718}" type="datetimeFigureOut">
               <a:rPr lang="en-US" smtClean="0"/>
-              <a:t>5/4/2026</a:t>
+              <a:t>5/6/2026</a:t>
             </a:fld>
             <a:endParaRPr lang="en-US"/>
           </a:p>
@@ -5053,7 +5060,7 @@
           <a:p>
             <a:fld id="{881E3564-4CE8-48D3-A61E-4443F66FC718}" type="datetimeFigureOut">
               <a:rPr lang="en-US" smtClean="0"/>
-              <a:t>5/4/2026</a:t>
+              <a:t>5/6/2026</a:t>
             </a:fld>
             <a:endParaRPr lang="en-US"/>
           </a:p>
@@ -7345,7 +7352,7 @@
           <a:p>
             <a:fld id="{881E3564-4CE8-48D3-A61E-4443F66FC718}" type="datetimeFigureOut">
               <a:rPr lang="en-US" smtClean="0"/>
-              <a:t>5/4/2026</a:t>
+              <a:t>5/6/2026</a:t>
             </a:fld>
             <a:endParaRPr lang="en-US"/>
           </a:p>
@@ -9550,10 +9557,10 @@
       </p:sp>
       <p:pic>
         <p:nvPicPr>
-          <p:cNvPr id="5" name="Picture 4">
+          <p:cNvPr id="7" name="Picture 6">
             <a:extLst>
               <a:ext uri="{FF2B5EF4-FFF2-40B4-BE49-F238E27FC236}">
-                <a16:creationId xmlns:a16="http://schemas.microsoft.com/office/drawing/2014/main" id="{7806DFD4-2451-91A8-F12D-81220731F72D}"/>
+                <a16:creationId xmlns:a16="http://schemas.microsoft.com/office/drawing/2014/main" id="{323DC066-C2CD-6B9C-8124-C9235CC1DF1A}"/>
               </a:ext>
             </a:extLst>
           </p:cNvPr>
@@ -9570,20 +9577,56 @@
         </p:blipFill>
         <p:spPr>
           <a:xfrm>
-            <a:off x="534512" y="2764903"/>
-            <a:ext cx="11122975" cy="1909884"/>
+            <a:off x="2763770" y="4930758"/>
+            <a:ext cx="6664460" cy="1316833"/>
           </a:xfrm>
           <a:prstGeom prst="rect">
             <a:avLst/>
           </a:prstGeom>
         </p:spPr>
       </p:pic>
+      <p:sp>
+        <p:nvSpPr>
+          <p:cNvPr id="8" name="TextBox 7">
+            <a:extLst>
+              <a:ext uri="{FF2B5EF4-FFF2-40B4-BE49-F238E27FC236}">
+                <a16:creationId xmlns:a16="http://schemas.microsoft.com/office/drawing/2014/main" id="{9B2D954E-FAD0-4C45-7779-DAE46AFBAA7C}"/>
+              </a:ext>
+            </a:extLst>
+          </p:cNvPr>
+          <p:cNvSpPr txBox="1"/>
+          <p:nvPr/>
+        </p:nvSpPr>
+        <p:spPr>
+          <a:xfrm>
+            <a:off x="4680372" y="6301628"/>
+            <a:ext cx="2831254" cy="369332"/>
+          </a:xfrm>
+          <a:prstGeom prst="rect">
+            <a:avLst/>
+          </a:prstGeom>
+          <a:noFill/>
+        </p:spPr>
+        <p:txBody>
+          <a:bodyPr wrap="square" rtlCol="0">
+            <a:spAutoFit/>
+          </a:bodyPr>
+          <a:lstStyle/>
+          <a:p>
+            <a:pPr algn="ctr"/>
+            <a:r>
+              <a:rPr lang="en-US" dirty="0"/>
+              <a:t>(in IF stage)</a:t>
+            </a:r>
+          </a:p>
+        </p:txBody>
+      </p:sp>
       <p:pic>
         <p:nvPicPr>
-          <p:cNvPr id="7" name="Picture 6">
+          <p:cNvPr id="4" name="Picture 3">
             <a:extLst>
               <a:ext uri="{FF2B5EF4-FFF2-40B4-BE49-F238E27FC236}">
-                <a16:creationId xmlns:a16="http://schemas.microsoft.com/office/drawing/2014/main" id="{323DC066-C2CD-6B9C-8124-C9235CC1DF1A}"/>
+                <a16:creationId xmlns:a16="http://schemas.microsoft.com/office/drawing/2014/main" id="{B2A4C8D2-23E2-9429-4D85-AE59FE24F12D}"/>
               </a:ext>
             </a:extLst>
           </p:cNvPr>
@@ -9600,50 +9643,14 @@
         </p:blipFill>
         <p:spPr>
           <a:xfrm>
-            <a:off x="2763770" y="4930758"/>
-            <a:ext cx="6664460" cy="1316833"/>
+            <a:off x="1203959" y="2726718"/>
+            <a:ext cx="9784080" cy="2021748"/>
           </a:xfrm>
           <a:prstGeom prst="rect">
             <a:avLst/>
           </a:prstGeom>
         </p:spPr>
       </p:pic>
-      <p:sp>
-        <p:nvSpPr>
-          <p:cNvPr id="8" name="TextBox 7">
-            <a:extLst>
-              <a:ext uri="{FF2B5EF4-FFF2-40B4-BE49-F238E27FC236}">
-                <a16:creationId xmlns:a16="http://schemas.microsoft.com/office/drawing/2014/main" id="{9B2D954E-FAD0-4C45-7779-DAE46AFBAA7C}"/>
-              </a:ext>
-            </a:extLst>
-          </p:cNvPr>
-          <p:cNvSpPr txBox="1"/>
-          <p:nvPr/>
-        </p:nvSpPr>
-        <p:spPr>
-          <a:xfrm>
-            <a:off x="4680372" y="6301628"/>
-            <a:ext cx="2831254" cy="369332"/>
-          </a:xfrm>
-          <a:prstGeom prst="rect">
-            <a:avLst/>
-          </a:prstGeom>
-          <a:noFill/>
-        </p:spPr>
-        <p:txBody>
-          <a:bodyPr wrap="square" rtlCol="0">
-            <a:spAutoFit/>
-          </a:bodyPr>
-          <a:lstStyle/>
-          <a:p>
-            <a:pPr algn="ctr"/>
-            <a:r>
-              <a:rPr lang="en-US" dirty="0"/>
-              <a:t>(in IF stage)</a:t>
-            </a:r>
-          </a:p>
-        </p:txBody>
-      </p:sp>
     </p:spTree>
     <p:extLst>
       <p:ext uri="{BB962C8B-B14F-4D97-AF65-F5344CB8AC3E}">
